--- a/courses/nus1/files/slides/W01.pptx
+++ b/courses/nus1/files/slides/W01.pptx
@@ -14,9 +14,9 @@
     <p:sldId id="258" r:id="rId5"/>
     <p:sldId id="265" r:id="rId6"/>
     <p:sldId id="266" r:id="rId7"/>
-    <p:sldId id="259" r:id="rId8"/>
-    <p:sldId id="267" r:id="rId9"/>
-    <p:sldId id="269" r:id="rId10"/>
+    <p:sldId id="267" r:id="rId8"/>
+    <p:sldId id="269" r:id="rId9"/>
+    <p:sldId id="259" r:id="rId10"/>
     <p:sldId id="262" r:id="rId11"/>
   </p:sldIdLst>
   <p:sldSz cx="12192000" cy="6858000"/>
@@ -842,76 +842,6 @@
   <p:cSld>
     <p:spTree>
       <p:nvGrpSpPr>
-        <p:cNvPr id="1" name=""/>
-        <p:cNvGrpSpPr/>
-        <p:nvPr/>
-      </p:nvGrpSpPr>
-      <p:grpSpPr>
-        <a:xfrm>
-          <a:off x="0" y="0"/>
-          <a:ext cx="0" cy="0"/>
-          <a:chOff x="0" y="0"/>
-          <a:chExt cx="0" cy="0"/>
-        </a:xfrm>
-      </p:grpSpPr>
-      <p:sp>
-        <p:nvSpPr>
-          <p:cNvPr id="2" name="Slide Image Placeholder 1"/>
-          <p:cNvSpPr>
-            <a:spLocks noGrp="1" noRot="1" noChangeAspect="1"/>
-          </p:cNvSpPr>
-          <p:nvPr>
-            <p:ph type="sldImg" idx="2"/>
-          </p:nvPr>
-        </p:nvSpPr>
-        <p:spPr/>
-      </p:sp>
-      <p:sp>
-        <p:nvSpPr>
-          <p:cNvPr id="3" name="Notes Placeholder 2"/>
-          <p:cNvSpPr>
-            <a:spLocks noGrp="1"/>
-          </p:cNvSpPr>
-          <p:nvPr>
-            <p:ph type="body" sz="quarter" idx="3"/>
-          </p:nvPr>
-        </p:nvSpPr>
-        <p:spPr/>
-        <p:txBody>
-          <a:bodyPr/>
-          <a:lstStyle/>
-          <a:p>
-            <a:r>
-              <a:t>Für eine grosse Formel, einen Rechenweg oder eine Lösung. Nicht mit Text vollpacken.</a:t>
-            </a:r>
-          </a:p>
-        </p:txBody>
-      </p:sp>
-      <p:sp>
-        <p:nvSpPr>
-          <p:cNvPr id="4" name="Slide Number Placeholder 3"/>
-          <p:cNvSpPr>
-            <a:spLocks noGrp="1"/>
-          </p:cNvSpPr>
-          <p:nvPr>
-            <p:ph type="sldNum" sz="quarter" idx="5"/>
-          </p:nvPr>
-        </p:nvSpPr>
-        <p:spPr/>
-      </p:sp>
-    </p:spTree>
-  </p:cSld>
-  <p:clrMapOvr>
-    <a:masterClrMapping/>
-  </p:clrMapOvr>
-</p:notes>
-</file>
-
-<file path=ppt/notesSlides/notesSlide8.xml><?xml version="1.0" encoding="utf-8"?>
-<p:notes xmlns:a="http://schemas.openxmlformats.org/drawingml/2006/main" xmlns:r="http://schemas.openxmlformats.org/officeDocument/2006/relationships" xmlns:p="http://schemas.openxmlformats.org/presentationml/2006/main">
-  <p:cSld>
-    <p:spTree>
-      <p:nvGrpSpPr>
         <p:cNvPr id="1" name="">
           <a:extLst>
             <a:ext uri="{FF2B5EF4-FFF2-40B4-BE49-F238E27FC236}">
@@ -1006,7 +936,7 @@
 </p:notes>
 </file>
 
-<file path=ppt/notesSlides/notesSlide9.xml><?xml version="1.0" encoding="utf-8"?>
+<file path=ppt/notesSlides/notesSlide8.xml><?xml version="1.0" encoding="utf-8"?>
 <p:notes xmlns:a="http://schemas.openxmlformats.org/drawingml/2006/main" xmlns:r="http://schemas.openxmlformats.org/officeDocument/2006/relationships" xmlns:p="http://schemas.openxmlformats.org/presentationml/2006/main">
   <p:cSld>
     <p:spTree>
@@ -1096,6 +1026,81 @@
     <p:extLst>
       <p:ext uri="{BB962C8B-B14F-4D97-AF65-F5344CB8AC3E}">
         <p14:creationId xmlns:p14="http://schemas.microsoft.com/office/powerpoint/2010/main" val="1221542073"/>
+      </p:ext>
+    </p:extLst>
+  </p:cSld>
+  <p:clrMapOvr>
+    <a:masterClrMapping/>
+  </p:clrMapOvr>
+</p:notes>
+</file>
+
+<file path=ppt/notesSlides/notesSlide9.xml><?xml version="1.0" encoding="utf-8"?>
+<p:notes xmlns:a="http://schemas.openxmlformats.org/drawingml/2006/main" xmlns:r="http://schemas.openxmlformats.org/officeDocument/2006/relationships" xmlns:p="http://schemas.openxmlformats.org/presentationml/2006/main">
+  <p:cSld>
+    <p:spTree>
+      <p:nvGrpSpPr>
+        <p:cNvPr id="1" name=""/>
+        <p:cNvGrpSpPr/>
+        <p:nvPr/>
+      </p:nvGrpSpPr>
+      <p:grpSpPr>
+        <a:xfrm>
+          <a:off x="0" y="0"/>
+          <a:ext cx="0" cy="0"/>
+          <a:chOff x="0" y="0"/>
+          <a:chExt cx="0" cy="0"/>
+        </a:xfrm>
+      </p:grpSpPr>
+      <p:sp>
+        <p:nvSpPr>
+          <p:cNvPr id="2" name="Slide Image Placeholder 1"/>
+          <p:cNvSpPr>
+            <a:spLocks noGrp="1" noRot="1" noChangeAspect="1"/>
+          </p:cNvSpPr>
+          <p:nvPr>
+            <p:ph type="sldImg" idx="2"/>
+          </p:nvPr>
+        </p:nvSpPr>
+        <p:spPr/>
+      </p:sp>
+      <p:sp>
+        <p:nvSpPr>
+          <p:cNvPr id="3" name="Notes Placeholder 2"/>
+          <p:cNvSpPr>
+            <a:spLocks noGrp="1"/>
+          </p:cNvSpPr>
+          <p:nvPr>
+            <p:ph type="body" sz="quarter" idx="3"/>
+          </p:nvPr>
+        </p:nvSpPr>
+        <p:spPr/>
+        <p:txBody>
+          <a:bodyPr/>
+          <a:lstStyle/>
+          <a:p>
+            <a:r>
+              <a:t>Für eine grosse Formel, einen Rechenweg oder eine Lösung. Nicht mit Text vollpacken.</a:t>
+            </a:r>
+          </a:p>
+        </p:txBody>
+      </p:sp>
+      <p:sp>
+        <p:nvSpPr>
+          <p:cNvPr id="4" name="Slide Number Placeholder 3"/>
+          <p:cNvSpPr>
+            <a:spLocks noGrp="1"/>
+          </p:cNvSpPr>
+          <p:nvPr>
+            <p:ph type="sldNum" sz="quarter" idx="5"/>
+          </p:nvPr>
+        </p:nvSpPr>
+        <p:spPr/>
+      </p:sp>
+    </p:spTree>
+    <p:extLst>
+      <p:ext uri="{BB962C8B-B14F-4D97-AF65-F5344CB8AC3E}">
+        <p14:creationId xmlns:p14="http://schemas.microsoft.com/office/powerpoint/2010/main" val="4141147240"/>
       </p:ext>
     </p:extLst>
   </p:cSld>
@@ -1284,7 +1289,7 @@
           <a:p>
             <a:fld id="{5BCAD085-E8A6-8845-BD4E-CB4CCA059FC4}" type="datetimeFigureOut">
               <a:rPr lang="en-US" smtClean="0"/>
-              <a:t>9/10/2026</a:t>
+              <a:t>9/16/2026</a:t>
             </a:fld>
             <a:endParaRPr lang="en-US"/>
           </a:p>
@@ -1452,7 +1457,7 @@
           <a:p>
             <a:fld id="{5BCAD085-E8A6-8845-BD4E-CB4CCA059FC4}" type="datetimeFigureOut">
               <a:rPr lang="en-US" smtClean="0"/>
-              <a:t>9/10/2026</a:t>
+              <a:t>9/16/2026</a:t>
             </a:fld>
             <a:endParaRPr lang="en-US"/>
           </a:p>
@@ -1630,7 +1635,7 @@
           <a:p>
             <a:fld id="{5BCAD085-E8A6-8845-BD4E-CB4CCA059FC4}" type="datetimeFigureOut">
               <a:rPr lang="en-US" smtClean="0"/>
-              <a:t>9/10/2026</a:t>
+              <a:t>9/16/2026</a:t>
             </a:fld>
             <a:endParaRPr lang="en-US"/>
           </a:p>
@@ -1798,7 +1803,7 @@
           <a:p>
             <a:fld id="{5BCAD085-E8A6-8845-BD4E-CB4CCA059FC4}" type="datetimeFigureOut">
               <a:rPr lang="en-US" smtClean="0"/>
-              <a:t>9/10/2026</a:t>
+              <a:t>9/16/2026</a:t>
             </a:fld>
             <a:endParaRPr lang="en-US"/>
           </a:p>
@@ -2043,7 +2048,7 @@
           <a:p>
             <a:fld id="{5BCAD085-E8A6-8845-BD4E-CB4CCA059FC4}" type="datetimeFigureOut">
               <a:rPr lang="en-US" smtClean="0"/>
-              <a:t>9/10/2026</a:t>
+              <a:t>9/16/2026</a:t>
             </a:fld>
             <a:endParaRPr lang="en-US"/>
           </a:p>
@@ -2328,7 +2333,7 @@
           <a:p>
             <a:fld id="{5BCAD085-E8A6-8845-BD4E-CB4CCA059FC4}" type="datetimeFigureOut">
               <a:rPr lang="en-US" smtClean="0"/>
-              <a:t>9/10/2026</a:t>
+              <a:t>9/16/2026</a:t>
             </a:fld>
             <a:endParaRPr lang="en-US"/>
           </a:p>
@@ -2747,7 +2752,7 @@
           <a:p>
             <a:fld id="{5BCAD085-E8A6-8845-BD4E-CB4CCA059FC4}" type="datetimeFigureOut">
               <a:rPr lang="en-US" smtClean="0"/>
-              <a:t>9/10/2026</a:t>
+              <a:t>9/16/2026</a:t>
             </a:fld>
             <a:endParaRPr lang="en-US"/>
           </a:p>
@@ -2864,7 +2869,7 @@
           <a:p>
             <a:fld id="{5BCAD085-E8A6-8845-BD4E-CB4CCA059FC4}" type="datetimeFigureOut">
               <a:rPr lang="en-US" smtClean="0"/>
-              <a:t>9/10/2026</a:t>
+              <a:t>9/16/2026</a:t>
             </a:fld>
             <a:endParaRPr lang="en-US"/>
           </a:p>
@@ -2959,7 +2964,7 @@
           <a:p>
             <a:fld id="{5BCAD085-E8A6-8845-BD4E-CB4CCA059FC4}" type="datetimeFigureOut">
               <a:rPr lang="en-US" smtClean="0"/>
-              <a:t>9/10/2026</a:t>
+              <a:t>9/16/2026</a:t>
             </a:fld>
             <a:endParaRPr lang="en-US"/>
           </a:p>
@@ -3234,7 +3239,7 @@
           <a:p>
             <a:fld id="{5BCAD085-E8A6-8845-BD4E-CB4CCA059FC4}" type="datetimeFigureOut">
               <a:rPr lang="en-US" smtClean="0"/>
-              <a:t>9/10/2026</a:t>
+              <a:t>9/16/2026</a:t>
             </a:fld>
             <a:endParaRPr lang="en-US"/>
           </a:p>
@@ -3486,7 +3491,7 @@
           <a:p>
             <a:fld id="{5BCAD085-E8A6-8845-BD4E-CB4CCA059FC4}" type="datetimeFigureOut">
               <a:rPr lang="en-US" smtClean="0"/>
-              <a:t>9/10/2026</a:t>
+              <a:t>9/16/2026</a:t>
             </a:fld>
             <a:endParaRPr lang="en-US"/>
           </a:p>
@@ -3700,7 +3705,7 @@
           <a:p>
             <a:fld id="{5BCAD085-E8A6-8845-BD4E-CB4CCA059FC4}" type="datetimeFigureOut">
               <a:rPr lang="en-US" smtClean="0"/>
-              <a:t>9/10/2026</a:t>
+              <a:t>9/16/2026</a:t>
             </a:fld>
             <a:endParaRPr lang="en-US"/>
           </a:p>
@@ -4287,7 +4292,7 @@
         <p:spPr>
           <a:xfrm>
             <a:off x="612648" y="3712463"/>
-            <a:ext cx="2821735" cy="261610"/>
+            <a:ext cx="2877839" cy="261610"/>
           </a:xfrm>
           <a:prstGeom prst="rect">
             <a:avLst/>
@@ -4308,16 +4313,7 @@
                 </a:solidFill>
                 <a:latin typeface="Aptos"/>
               </a:rPr>
-              <a:t>Vektoren und </a:t>
-            </a:r>
-            <a:r>
-              <a:rPr lang="de-CH" sz="1700" dirty="0" err="1">
-                <a:solidFill>
-                  <a:srgbClr val="737373"/>
-                </a:solidFill>
-                <a:latin typeface="Aptos"/>
-              </a:rPr>
-              <a:t>Integralrechung</a:t>
+              <a:t>Vektoren und Integralrechnung</a:t>
             </a:r>
             <a:endParaRPr sz="1700" b="0" dirty="0">
               <a:solidFill>
@@ -4440,10 +4436,10 @@
       </p:sp>
       <p:pic>
         <p:nvPicPr>
-          <p:cNvPr id="11" name="Grafik 10">
+          <p:cNvPr id="12" name="Grafik 11">
             <a:extLst>
               <a:ext uri="{FF2B5EF4-FFF2-40B4-BE49-F238E27FC236}">
-                <a16:creationId xmlns:a16="http://schemas.microsoft.com/office/drawing/2014/main" id="{0D1A7063-BF8F-D128-C379-07FCFED4AC6E}"/>
+                <a16:creationId xmlns:a16="http://schemas.microsoft.com/office/drawing/2014/main" id="{B932C14E-E0C6-CFF7-CC6F-104FC27FE773}"/>
               </a:ext>
             </a:extLst>
           </p:cNvPr>
@@ -4460,8 +4456,8 @@
         </p:blipFill>
         <p:spPr>
           <a:xfrm>
-            <a:off x="8430768" y="271310"/>
-            <a:ext cx="3136392" cy="3136392"/>
+            <a:off x="9113435" y="236574"/>
+            <a:ext cx="2689505" cy="2689505"/>
           </a:xfrm>
           <a:prstGeom prst="rect">
             <a:avLst/>
@@ -4470,10 +4466,10 @@
       </p:pic>
       <p:sp>
         <p:nvSpPr>
-          <p:cNvPr id="13" name="TextBox 7">
+          <p:cNvPr id="15" name="TextBox 7">
             <a:extLst>
               <a:ext uri="{FF2B5EF4-FFF2-40B4-BE49-F238E27FC236}">
-                <a16:creationId xmlns:a16="http://schemas.microsoft.com/office/drawing/2014/main" id="{F78FDD6A-A394-1FCD-8583-FB60743A0344}"/>
+                <a16:creationId xmlns:a16="http://schemas.microsoft.com/office/drawing/2014/main" id="{8A31C67E-0AD6-59DC-10B9-FBD212B3631D}"/>
               </a:ext>
             </a:extLst>
           </p:cNvPr>
@@ -4482,7 +4478,7 @@
         </p:nvSpPr>
         <p:spPr>
           <a:xfrm>
-            <a:off x="9712026" y="3447138"/>
+            <a:off x="10171249" y="2926079"/>
             <a:ext cx="573875" cy="169277"/>
           </a:xfrm>
           <a:prstGeom prst="rect">
@@ -4504,6 +4500,82 @@
                 <a:latin typeface="Aptos"/>
               </a:rPr>
               <a:t>Webseite</a:t>
+            </a:r>
+            <a:endParaRPr sz="1100" b="0" dirty="0">
+              <a:solidFill>
+                <a:srgbClr val="737373"/>
+              </a:solidFill>
+              <a:latin typeface="Aptos"/>
+            </a:endParaRPr>
+          </a:p>
+        </p:txBody>
+      </p:sp>
+      <p:pic>
+        <p:nvPicPr>
+          <p:cNvPr id="17" name="Grafik 16">
+            <a:extLst>
+              <a:ext uri="{FF2B5EF4-FFF2-40B4-BE49-F238E27FC236}">
+                <a16:creationId xmlns:a16="http://schemas.microsoft.com/office/drawing/2014/main" id="{6FA7C2BA-4175-7C57-859A-17332D2C866A}"/>
+              </a:ext>
+            </a:extLst>
+          </p:cNvPr>
+          <p:cNvPicPr>
+            <a:picLocks noChangeAspect="1"/>
+          </p:cNvPicPr>
+          <p:nvPr/>
+        </p:nvPicPr>
+        <p:blipFill>
+          <a:blip r:embed="rId4"/>
+          <a:stretch>
+            <a:fillRect/>
+          </a:stretch>
+        </p:blipFill>
+        <p:spPr>
+          <a:xfrm>
+            <a:off x="9113435" y="3246120"/>
+            <a:ext cx="2689505" cy="2689505"/>
+          </a:xfrm>
+          <a:prstGeom prst="rect">
+            <a:avLst/>
+          </a:prstGeom>
+        </p:spPr>
+      </p:pic>
+      <p:sp>
+        <p:nvSpPr>
+          <p:cNvPr id="19" name="TextBox 7">
+            <a:extLst>
+              <a:ext uri="{FF2B5EF4-FFF2-40B4-BE49-F238E27FC236}">
+                <a16:creationId xmlns:a16="http://schemas.microsoft.com/office/drawing/2014/main" id="{92334E4D-7CBF-F2AB-00BC-8E6D995CA411}"/>
+              </a:ext>
+            </a:extLst>
+          </p:cNvPr>
+          <p:cNvSpPr txBox="1"/>
+          <p:nvPr/>
+        </p:nvSpPr>
+        <p:spPr>
+          <a:xfrm>
+            <a:off x="10249795" y="5850986"/>
+            <a:ext cx="416781" cy="169277"/>
+          </a:xfrm>
+          <a:prstGeom prst="rect">
+            <a:avLst/>
+          </a:prstGeom>
+          <a:noFill/>
+        </p:spPr>
+        <p:txBody>
+          <a:bodyPr wrap="none" lIns="0" tIns="0" rIns="0" bIns="0" anchor="t">
+            <a:spAutoFit/>
+          </a:bodyPr>
+          <a:lstStyle/>
+          <a:p>
+            <a:r>
+              <a:rPr lang="de-CH" sz="1100" dirty="0">
+                <a:solidFill>
+                  <a:srgbClr val="737373"/>
+                </a:solidFill>
+                <a:latin typeface="Aptos"/>
+              </a:rPr>
+              <a:t>Fragen</a:t>
             </a:r>
             <a:endParaRPr sz="1100" b="0" dirty="0">
               <a:solidFill>
@@ -5233,7 +5305,7 @@
         <p:spPr>
           <a:xfrm>
             <a:off x="8247888" y="3246120"/>
-            <a:ext cx="2929263" cy="553998"/>
+            <a:ext cx="2990947" cy="553998"/>
           </a:xfrm>
           <a:prstGeom prst="rect">
             <a:avLst/>
@@ -5248,22 +5320,13 @@
           <a:p>
             <a:pPr algn="l"/>
             <a:r>
-              <a:rPr lang="de-CH" b="1" dirty="0" err="1">
+              <a:rPr lang="de-CH" b="1" dirty="0">
                 <a:solidFill>
                   <a:srgbClr val="171717"/>
                 </a:solidFill>
                 <a:latin typeface="Aptos"/>
               </a:rPr>
-              <a:t>Evlt</a:t>
-            </a:r>
-            <a:r>
-              <a:rPr lang="de-CH" b="1" dirty="0">
-                <a:solidFill>
-                  <a:srgbClr val="171717"/>
-                </a:solidFill>
-                <a:latin typeface="Aptos"/>
-              </a:rPr>
-              <a:t>. Verstehen was Flächen</a:t>
+              <a:t>Evtl. verstehen was Flächen-</a:t>
             </a:r>
             <a:br>
               <a:rPr lang="de-CH" b="1" dirty="0">
@@ -5322,41 +5385,6 @@
                 <a:latin typeface="Aptos"/>
               </a:rPr>
               <a:t>Fragen?</a:t>
-            </a:r>
-          </a:p>
-        </p:txBody>
-      </p:sp>
-      <p:sp>
-        <p:nvSpPr>
-          <p:cNvPr id="20" name="TextBox 19"/>
-          <p:cNvSpPr txBox="1"/>
-          <p:nvPr/>
-        </p:nvSpPr>
-        <p:spPr>
-          <a:xfrm>
-            <a:off x="640080" y="5532120"/>
-            <a:ext cx="4572000" cy="274320"/>
-          </a:xfrm>
-          <a:prstGeom prst="rect">
-            <a:avLst/>
-          </a:prstGeom>
-          <a:noFill/>
-        </p:spPr>
-        <p:txBody>
-          <a:bodyPr wrap="none" lIns="0" tIns="0" rIns="0" bIns="0" anchor="t">
-            <a:spAutoFit/>
-          </a:bodyPr>
-          <a:lstStyle/>
-          <a:p>
-            <a:pPr algn="l"/>
-            <a:r>
-              <a:rPr sz="1050" b="0">
-                <a:solidFill>
-                  <a:srgbClr val="737373"/>
-                </a:solidFill>
-                <a:latin typeface="Aptos"/>
-              </a:rPr>
-              <a:t>[QR / Link zum Fragen-Tool]</a:t>
             </a:r>
           </a:p>
         </p:txBody>
@@ -5817,36 +5845,6 @@
       </p:sp>
       <p:pic>
         <p:nvPicPr>
-          <p:cNvPr id="10" name="Grafik 9" descr="VECTOR - Imgflip">
-            <a:extLst>
-              <a:ext uri="{FF2B5EF4-FFF2-40B4-BE49-F238E27FC236}">
-                <a16:creationId xmlns:a16="http://schemas.microsoft.com/office/drawing/2014/main" id="{CBABBBAA-6AF8-D295-4B8E-899170E2FB5E}"/>
-              </a:ext>
-            </a:extLst>
-          </p:cNvPr>
-          <p:cNvPicPr>
-            <a:picLocks noChangeAspect="1"/>
-          </p:cNvPicPr>
-          <p:nvPr/>
-        </p:nvPicPr>
-        <p:blipFill>
-          <a:blip r:embed="rId3"/>
-          <a:stretch>
-            <a:fillRect/>
-          </a:stretch>
-        </p:blipFill>
-        <p:spPr>
-          <a:xfrm>
-            <a:off x="10015193" y="315752"/>
-            <a:ext cx="1608809" cy="2187980"/>
-          </a:xfrm>
-          <a:prstGeom prst="rect">
-            <a:avLst/>
-          </a:prstGeom>
-        </p:spPr>
-      </p:pic>
-      <p:pic>
-        <p:nvPicPr>
           <p:cNvPr id="13" name="Grafik 12" descr="An introduction to vectors - Math Insight">
             <a:extLst>
               <a:ext uri="{FF2B5EF4-FFF2-40B4-BE49-F238E27FC236}">
@@ -5860,7 +5858,7 @@
           <p:nvPr/>
         </p:nvPicPr>
         <p:blipFill>
-          <a:blip r:embed="rId4"/>
+          <a:blip r:embed="rId3"/>
           <a:stretch>
             <a:fillRect/>
           </a:stretch>
@@ -6675,36 +6673,6 @@
           </a:prstGeom>
         </p:spPr>
       </p:pic>
-      <p:pic>
-        <p:nvPicPr>
-          <p:cNvPr id="15" name="Grafik 14" descr="Stream WAIT WAIT WAIT, WHAT THE HELL by Gr1zzlylifts | Listen online for  free on SoundCloud">
-            <a:extLst>
-              <a:ext uri="{FF2B5EF4-FFF2-40B4-BE49-F238E27FC236}">
-                <a16:creationId xmlns:a16="http://schemas.microsoft.com/office/drawing/2014/main" id="{D7483343-DA1A-15E2-1AF2-4C3134E1801C}"/>
-              </a:ext>
-            </a:extLst>
-          </p:cNvPr>
-          <p:cNvPicPr>
-            <a:picLocks noChangeAspect="1"/>
-          </p:cNvPicPr>
-          <p:nvPr/>
-        </p:nvPicPr>
-        <p:blipFill>
-          <a:blip r:embed="rId5"/>
-          <a:stretch>
-            <a:fillRect/>
-          </a:stretch>
-        </p:blipFill>
-        <p:spPr>
-          <a:xfrm>
-            <a:off x="5839114" y="1113082"/>
-            <a:ext cx="1139029" cy="1139029"/>
-          </a:xfrm>
-          <a:prstGeom prst="rect">
-            <a:avLst/>
-          </a:prstGeom>
-        </p:spPr>
-      </p:pic>
       <p:sp>
         <p:nvSpPr>
           <p:cNvPr id="16" name="Multiplikationszeichen 15">
@@ -6783,7 +6751,7 @@
           <p:nvPr/>
         </p:nvPicPr>
         <p:blipFill>
-          <a:blip r:embed="rId6"/>
+          <a:blip r:embed="rId5"/>
           <a:stretch>
             <a:fillRect/>
           </a:stretch>
@@ -6813,7 +6781,7 @@
           <p:nvPr/>
         </p:nvPicPr>
         <p:blipFill>
-          <a:blip r:embed="rId7"/>
+          <a:blip r:embed="rId6"/>
           <a:stretch>
             <a:fillRect/>
           </a:stretch>
@@ -6843,7 +6811,7 @@
           <p:nvPr/>
         </p:nvPicPr>
         <p:blipFill>
-          <a:blip r:embed="rId8"/>
+          <a:blip r:embed="rId7"/>
           <a:stretch>
             <a:fillRect/>
           </a:stretch>
@@ -6873,7 +6841,7 @@
           <p:nvPr/>
         </p:nvPicPr>
         <p:blipFill>
-          <a:blip r:embed="rId9"/>
+          <a:blip r:embed="rId8"/>
           <a:stretch>
             <a:fillRect/>
           </a:stretch>
@@ -6903,7 +6871,7 @@
           <p:nvPr/>
         </p:nvPicPr>
         <p:blipFill>
-          <a:blip r:embed="rId10"/>
+          <a:blip r:embed="rId9"/>
           <a:stretch>
             <a:fillRect/>
           </a:stretch>
@@ -6933,7 +6901,7 @@
           <p:nvPr/>
         </p:nvPicPr>
         <p:blipFill>
-          <a:blip r:embed="rId11"/>
+          <a:blip r:embed="rId10"/>
           <a:stretch>
             <a:fillRect/>
           </a:stretch>
@@ -7087,7 +7055,7 @@
         <p:spPr>
           <a:xfrm>
             <a:off x="594360" y="932688"/>
-            <a:ext cx="1711431" cy="477054"/>
+            <a:ext cx="3911199" cy="477054"/>
           </a:xfrm>
           <a:prstGeom prst="rect">
             <a:avLst/>
@@ -7108,7 +7076,7 @@
                 </a:solidFill>
                 <a:latin typeface="Aptos"/>
               </a:rPr>
-              <a:t>Aufgaben</a:t>
+              <a:t>Kartesisch -&gt; Zylinder</a:t>
             </a:r>
             <a:endParaRPr sz="3100" b="1" dirty="0">
               <a:solidFill>
@@ -7283,12 +7251,154 @@
           </a:p>
         </p:txBody>
       </p:sp>
-      <p:sp>
-        <p:nvSpPr>
-          <p:cNvPr id="11" name="TextBox 10">
+      <mc:AlternateContent xmlns:mc="http://schemas.openxmlformats.org/markup-compatibility/2006">
+        <mc:Choice xmlns:a14="http://schemas.microsoft.com/office/drawing/2010/main" Requires="a14">
+          <p:sp>
+            <p:nvSpPr>
+              <p:cNvPr id="5" name="Textfeld 4">
+                <a:extLst>
+                  <a:ext uri="{FF2B5EF4-FFF2-40B4-BE49-F238E27FC236}">
+                    <a16:creationId xmlns:a16="http://schemas.microsoft.com/office/drawing/2014/main" id="{BAD98907-27FC-3BC3-7856-64D34332802C}"/>
+                  </a:ext>
+                </a:extLst>
+              </p:cNvPr>
+              <p:cNvSpPr txBox="1"/>
+              <p:nvPr/>
+            </p:nvSpPr>
+            <p:spPr>
+              <a:xfrm>
+                <a:off x="577113" y="1677804"/>
+                <a:ext cx="3143451" cy="516167"/>
+              </a:xfrm>
+              <a:prstGeom prst="rect">
+                <a:avLst/>
+              </a:prstGeom>
+              <a:noFill/>
+            </p:spPr>
+            <p:txBody>
+              <a:bodyPr wrap="square" lIns="0" tIns="0" rIns="0" bIns="0" rtlCol="0">
+                <a:spAutoFit/>
+              </a:bodyPr>
+              <a:lstStyle/>
+              <a:p>
+                <a14:m>
+                  <m:oMathPara xmlns:m="http://schemas.openxmlformats.org/officeDocument/2006/math">
+                    <m:oMath>
+                      <m:r>
+                        <a:rPr lang="de-CH" sz="2800" b="0" i="1" smtClean="0">
+                          <a:latin typeface="Cambria Math" panose="02040503050406030204" pitchFamily="18" charset="0"/>
+                        </a:rPr>
+                        <m:t>𝑃</m:t>
+                      </m:r>
+                      <m:r>
+                        <a:rPr lang="de-CH" sz="2800" b="0" i="1" smtClean="0">
+                          <a:latin typeface="Cambria Math" panose="02040503050406030204" pitchFamily="18" charset="0"/>
+                        </a:rPr>
+                        <m:t>=</m:t>
+                      </m:r>
+                      <m:d>
+                        <m:dPr>
+                          <m:ctrlPr>
+                            <a:rPr lang="de-CH" sz="2800" b="0" i="1" smtClean="0">
+                              <a:latin typeface="Cambria Math" panose="02040503050406030204" pitchFamily="18" charset="0"/>
+                            </a:rPr>
+                          </m:ctrlPr>
+                        </m:dPr>
+                        <m:e>
+                          <m:r>
+                            <a:rPr lang="de-CH" sz="2800" b="0" i="1" smtClean="0">
+                              <a:latin typeface="Cambria Math" panose="02040503050406030204" pitchFamily="18" charset="0"/>
+                            </a:rPr>
+                            <m:t>3,3∗</m:t>
+                          </m:r>
+                          <m:rad>
+                            <m:radPr>
+                              <m:degHide m:val="on"/>
+                              <m:ctrlPr>
+                                <a:rPr lang="de-CH" sz="2800" b="0" i="1" smtClean="0">
+                                  <a:latin typeface="Cambria Math" panose="02040503050406030204" pitchFamily="18" charset="0"/>
+                                </a:rPr>
+                              </m:ctrlPr>
+                            </m:radPr>
+                            <m:deg/>
+                            <m:e>
+                              <m:r>
+                                <a:rPr lang="de-CH" sz="2800" b="0" i="1" smtClean="0">
+                                  <a:latin typeface="Cambria Math" panose="02040503050406030204" pitchFamily="18" charset="0"/>
+                                  <a:ea typeface="Cambria Math" panose="02040503050406030204" pitchFamily="18" charset="0"/>
+                                </a:rPr>
+                                <m:t>3</m:t>
+                              </m:r>
+                            </m:e>
+                          </m:rad>
+                          <m:r>
+                            <a:rPr lang="de-CH" sz="2800" b="0" i="1" smtClean="0">
+                              <a:latin typeface="Cambria Math" panose="02040503050406030204" pitchFamily="18" charset="0"/>
+                              <a:ea typeface="Cambria Math" panose="02040503050406030204" pitchFamily="18" charset="0"/>
+                            </a:rPr>
+                            <m:t>,5</m:t>
+                          </m:r>
+                        </m:e>
+                      </m:d>
+                    </m:oMath>
+                  </m:oMathPara>
+                </a14:m>
+                <a:endParaRPr lang="de-CH" sz="2800" dirty="0"/>
+              </a:p>
+            </p:txBody>
+          </p:sp>
+        </mc:Choice>
+        <mc:Fallback>
+          <p:sp>
+            <p:nvSpPr>
+              <p:cNvPr id="5" name="Textfeld 4">
+                <a:extLst>
+                  <a:ext uri="{FF2B5EF4-FFF2-40B4-BE49-F238E27FC236}">
+                    <a16:creationId xmlns:a16="http://schemas.microsoft.com/office/drawing/2014/main" id="{BAD98907-27FC-3BC3-7856-64D34332802C}"/>
+                  </a:ext>
+                </a:extLst>
+              </p:cNvPr>
+              <p:cNvSpPr txBox="1">
+                <a:spLocks noRot="1" noChangeAspect="1" noMove="1" noResize="1" noEditPoints="1" noAdjustHandles="1" noChangeArrowheads="1" noChangeShapeType="1" noTextEdit="1"/>
+              </p:cNvSpPr>
+              <p:nvPr/>
+            </p:nvSpPr>
+            <p:spPr>
+              <a:xfrm>
+                <a:off x="577113" y="1677804"/>
+                <a:ext cx="3143451" cy="516167"/>
+              </a:xfrm>
+              <a:prstGeom prst="rect">
+                <a:avLst/>
+              </a:prstGeom>
+              <a:blipFill>
+                <a:blip r:embed="rId3"/>
+                <a:stretch>
+                  <a:fillRect/>
+                </a:stretch>
+              </a:blipFill>
+            </p:spPr>
+            <p:txBody>
+              <a:bodyPr/>
+              <a:lstStyle/>
+              <a:p>
+                <a:r>
+                  <a:rPr lang="de-CH">
+                    <a:noFill/>
+                  </a:rPr>
+                  <a:t> </a:t>
+                </a:r>
+              </a:p>
+            </p:txBody>
+          </p:sp>
+        </mc:Fallback>
+      </mc:AlternateContent>
+      <p:sp>
+        <p:nvSpPr>
+          <p:cNvPr id="13" name="TextBox 3">
             <a:extLst>
               <a:ext uri="{FF2B5EF4-FFF2-40B4-BE49-F238E27FC236}">
-                <a16:creationId xmlns:a16="http://schemas.microsoft.com/office/drawing/2014/main" id="{60FA28EB-4818-1331-D467-2C360A34CCEA}"/>
+                <a16:creationId xmlns:a16="http://schemas.microsoft.com/office/drawing/2014/main" id="{B93CAE33-6F5C-7AFF-70C9-4AC3D88126A7}"/>
               </a:ext>
             </a:extLst>
           </p:cNvPr>
@@ -7297,49 +7407,8 @@
         </p:nvSpPr>
         <p:spPr>
           <a:xfrm>
-            <a:off x="914400" y="2880360"/>
-            <a:ext cx="10332720" cy="1051560"/>
-          </a:xfrm>
-          <a:prstGeom prst="rect">
-            <a:avLst/>
-          </a:prstGeom>
-          <a:noFill/>
-        </p:spPr>
-        <p:txBody>
-          <a:bodyPr wrap="none" lIns="0" tIns="0" rIns="0" bIns="0" anchor="ctr">
-            <a:spAutoFit/>
-          </a:bodyPr>
-          <a:lstStyle/>
-          <a:p>
-            <a:pPr algn="ctr"/>
-            <a:r>
-              <a:rPr sz="2900" b="1">
-                <a:solidFill>
-                  <a:srgbClr val="171717"/>
-                </a:solidFill>
-                <a:latin typeface="Aptos"/>
-              </a:rPr>
-              <a:t>[Formel / Rechnung / Lösungsweg]</a:t>
-            </a:r>
-          </a:p>
-        </p:txBody>
-      </p:sp>
-      <p:sp>
-        <p:nvSpPr>
-          <p:cNvPr id="12" name="TextBox 11">
-            <a:extLst>
-              <a:ext uri="{FF2B5EF4-FFF2-40B4-BE49-F238E27FC236}">
-                <a16:creationId xmlns:a16="http://schemas.microsoft.com/office/drawing/2014/main" id="{6CDA00D5-CF69-C4CC-E415-32B7904D830F}"/>
-              </a:ext>
-            </a:extLst>
-          </p:cNvPr>
-          <p:cNvSpPr txBox="1"/>
-          <p:nvPr/>
-        </p:nvSpPr>
-        <p:spPr>
-          <a:xfrm>
-            <a:off x="914400" y="4315968"/>
-            <a:ext cx="10332720" cy="457200"/>
+            <a:off x="7129625" y="932688"/>
+            <a:ext cx="3449983" cy="477054"/>
           </a:xfrm>
           <a:prstGeom prst="rect">
             <a:avLst/>
@@ -7352,19 +7421,201 @@
           </a:bodyPr>
           <a:lstStyle/>
           <a:p>
-            <a:pPr algn="ctr"/>
-            <a:r>
-              <a:rPr sz="1400" b="0">
-                <a:solidFill>
-                  <a:srgbClr val="737373"/>
+            <a:pPr algn="l"/>
+            <a:r>
+              <a:rPr lang="de-CH" sz="3100" b="1" dirty="0">
+                <a:solidFill>
+                  <a:srgbClr val="171717"/>
                 </a:solidFill>
                 <a:latin typeface="Aptos"/>
               </a:rPr>
-              <a:t>Zwischenschritte / kurze Hinweise</a:t>
-            </a:r>
-          </a:p>
-        </p:txBody>
-      </p:sp>
+              <a:t>Kartesisch -&gt; Kugel</a:t>
+            </a:r>
+            <a:endParaRPr sz="3100" b="1" dirty="0">
+              <a:solidFill>
+                <a:srgbClr val="171717"/>
+              </a:solidFill>
+              <a:latin typeface="Aptos"/>
+            </a:endParaRPr>
+          </a:p>
+        </p:txBody>
+      </p:sp>
+      <mc:AlternateContent xmlns:mc="http://schemas.openxmlformats.org/markup-compatibility/2006">
+        <mc:Choice xmlns:a14="http://schemas.microsoft.com/office/drawing/2010/main" Requires="a14">
+          <p:sp>
+            <p:nvSpPr>
+              <p:cNvPr id="15" name="Textfeld 14">
+                <a:extLst>
+                  <a:ext uri="{FF2B5EF4-FFF2-40B4-BE49-F238E27FC236}">
+                    <a16:creationId xmlns:a16="http://schemas.microsoft.com/office/drawing/2014/main" id="{95E7D129-1467-0D69-6CCC-97404B5A6F2C}"/>
+                  </a:ext>
+                </a:extLst>
+              </p:cNvPr>
+              <p:cNvSpPr txBox="1"/>
+              <p:nvPr/>
+            </p:nvSpPr>
+            <p:spPr>
+              <a:xfrm>
+                <a:off x="7112378" y="1677804"/>
+                <a:ext cx="3143451" cy="516167"/>
+              </a:xfrm>
+              <a:prstGeom prst="rect">
+                <a:avLst/>
+              </a:prstGeom>
+              <a:noFill/>
+            </p:spPr>
+            <p:txBody>
+              <a:bodyPr wrap="square" lIns="0" tIns="0" rIns="0" bIns="0" rtlCol="0">
+                <a:spAutoFit/>
+              </a:bodyPr>
+              <a:lstStyle/>
+              <a:p>
+                <a:pPr/>
+                <a14:m>
+                  <m:oMathPara xmlns:m="http://schemas.openxmlformats.org/officeDocument/2006/math">
+                    <m:oMath>
+                      <m:r>
+                        <a:rPr lang="de-CH" sz="2800" b="0" i="1" smtClean="0">
+                          <a:latin typeface="Cambria Math" panose="02040503050406030204" pitchFamily="18" charset="0"/>
+                        </a:rPr>
+                        <m:t>𝑃</m:t>
+                      </m:r>
+                      <m:r>
+                        <a:rPr lang="de-CH" sz="2800" b="0" i="1" smtClean="0">
+                          <a:latin typeface="Cambria Math" panose="02040503050406030204" pitchFamily="18" charset="0"/>
+                        </a:rPr>
+                        <m:t>=</m:t>
+                      </m:r>
+                      <m:d>
+                        <m:dPr>
+                          <m:ctrlPr>
+                            <a:rPr lang="de-CH" sz="2800" b="0" i="1" smtClean="0">
+                              <a:latin typeface="Cambria Math" panose="02040503050406030204" pitchFamily="18" charset="0"/>
+                            </a:rPr>
+                          </m:ctrlPr>
+                        </m:dPr>
+                        <m:e>
+                          <m:r>
+                            <a:rPr lang="de-CH" sz="2800" b="0" i="1" smtClean="0">
+                              <a:latin typeface="Cambria Math" panose="02040503050406030204" pitchFamily="18" charset="0"/>
+                            </a:rPr>
+                            <m:t>1</m:t>
+                          </m:r>
+                          <m:r>
+                            <a:rPr lang="de-CH" sz="2800" b="0" i="1" smtClean="0">
+                              <a:latin typeface="Cambria Math" panose="02040503050406030204" pitchFamily="18" charset="0"/>
+                            </a:rPr>
+                            <m:t>,</m:t>
+                          </m:r>
+                          <m:rad>
+                            <m:radPr>
+                              <m:degHide m:val="on"/>
+                              <m:ctrlPr>
+                                <a:rPr lang="de-CH" sz="2800" b="0" i="1" smtClean="0">
+                                  <a:latin typeface="Cambria Math" panose="02040503050406030204" pitchFamily="18" charset="0"/>
+                                </a:rPr>
+                              </m:ctrlPr>
+                            </m:radPr>
+                            <m:deg/>
+                            <m:e>
+                              <m:r>
+                                <a:rPr lang="de-CH" sz="2800" b="0" i="1" smtClean="0">
+                                  <a:latin typeface="Cambria Math" panose="02040503050406030204" pitchFamily="18" charset="0"/>
+                                  <a:ea typeface="Cambria Math" panose="02040503050406030204" pitchFamily="18" charset="0"/>
+                                </a:rPr>
+                                <m:t>3</m:t>
+                              </m:r>
+                            </m:e>
+                          </m:rad>
+                          <m:r>
+                            <a:rPr lang="de-CH" sz="2800" b="0" i="1" smtClean="0">
+                              <a:latin typeface="Cambria Math" panose="02040503050406030204" pitchFamily="18" charset="0"/>
+                              <a:ea typeface="Cambria Math" panose="02040503050406030204" pitchFamily="18" charset="0"/>
+                            </a:rPr>
+                            <m:t>,</m:t>
+                          </m:r>
+                          <m:r>
+                            <a:rPr lang="de-CH" sz="2800" b="0" i="1" smtClean="0">
+                              <a:latin typeface="Cambria Math" panose="02040503050406030204" pitchFamily="18" charset="0"/>
+                              <a:ea typeface="Cambria Math" panose="02040503050406030204" pitchFamily="18" charset="0"/>
+                            </a:rPr>
+                            <m:t>2∗</m:t>
+                          </m:r>
+                          <m:rad>
+                            <m:radPr>
+                              <m:degHide m:val="on"/>
+                              <m:ctrlPr>
+                                <a:rPr lang="de-CH" sz="2800" i="1">
+                                  <a:latin typeface="Cambria Math" panose="02040503050406030204" pitchFamily="18" charset="0"/>
+                                </a:rPr>
+                              </m:ctrlPr>
+                            </m:radPr>
+                            <m:deg/>
+                            <m:e>
+                              <m:r>
+                                <a:rPr lang="de-CH" sz="2800" i="1">
+                                  <a:latin typeface="Cambria Math" panose="02040503050406030204" pitchFamily="18" charset="0"/>
+                                  <a:ea typeface="Cambria Math" panose="02040503050406030204" pitchFamily="18" charset="0"/>
+                                </a:rPr>
+                                <m:t>3</m:t>
+                              </m:r>
+                            </m:e>
+                          </m:rad>
+                        </m:e>
+                      </m:d>
+                    </m:oMath>
+                  </m:oMathPara>
+                </a14:m>
+                <a:endParaRPr lang="de-CH" sz="2800" dirty="0"/>
+              </a:p>
+            </p:txBody>
+          </p:sp>
+        </mc:Choice>
+        <mc:Fallback>
+          <p:sp>
+            <p:nvSpPr>
+              <p:cNvPr id="15" name="Textfeld 14">
+                <a:extLst>
+                  <a:ext uri="{FF2B5EF4-FFF2-40B4-BE49-F238E27FC236}">
+                    <a16:creationId xmlns:a16="http://schemas.microsoft.com/office/drawing/2014/main" id="{95E7D129-1467-0D69-6CCC-97404B5A6F2C}"/>
+                  </a:ext>
+                </a:extLst>
+              </p:cNvPr>
+              <p:cNvSpPr txBox="1">
+                <a:spLocks noRot="1" noChangeAspect="1" noMove="1" noResize="1" noEditPoints="1" noAdjustHandles="1" noChangeArrowheads="1" noChangeShapeType="1" noTextEdit="1"/>
+              </p:cNvSpPr>
+              <p:nvPr/>
+            </p:nvSpPr>
+            <p:spPr>
+              <a:xfrm>
+                <a:off x="7112378" y="1677804"/>
+                <a:ext cx="3143451" cy="516167"/>
+              </a:xfrm>
+              <a:prstGeom prst="rect">
+                <a:avLst/>
+              </a:prstGeom>
+              <a:blipFill>
+                <a:blip r:embed="rId4"/>
+                <a:stretch>
+                  <a:fillRect/>
+                </a:stretch>
+              </a:blipFill>
+            </p:spPr>
+            <p:txBody>
+              <a:bodyPr/>
+              <a:lstStyle/>
+              <a:p>
+                <a:r>
+                  <a:rPr lang="de-CH">
+                    <a:noFill/>
+                  </a:rPr>
+                  <a:t> </a:t>
+                </a:r>
+              </a:p>
+            </p:txBody>
+          </p:sp>
+        </mc:Fallback>
+      </mc:AlternateContent>
     </p:spTree>
     <p:extLst>
       <p:ext uri="{BB962C8B-B14F-4D97-AF65-F5344CB8AC3E}">
@@ -7898,428 +8149,6 @@
   <p:cSld>
     <p:spTree>
       <p:nvGrpSpPr>
-        <p:cNvPr id="1" name=""/>
-        <p:cNvGrpSpPr/>
-        <p:nvPr/>
-      </p:nvGrpSpPr>
-      <p:grpSpPr>
-        <a:xfrm>
-          <a:off x="0" y="0"/>
-          <a:ext cx="0" cy="0"/>
-          <a:chOff x="0" y="0"/>
-          <a:chExt cx="0" cy="0"/>
-        </a:xfrm>
-      </p:grpSpPr>
-      <p:sp>
-        <p:nvSpPr>
-          <p:cNvPr id="2" name="Rounded Rectangle 1"/>
-          <p:cNvSpPr/>
-          <p:nvPr/>
-        </p:nvSpPr>
-        <p:spPr>
-          <a:xfrm>
-            <a:off x="594360" y="475488"/>
-            <a:ext cx="1042416" cy="292608"/>
-          </a:xfrm>
-          <a:prstGeom prst="roundRect">
-            <a:avLst/>
-          </a:prstGeom>
-          <a:solidFill>
-            <a:srgbClr val="EEEEEA"/>
-          </a:solidFill>
-          <a:ln w="10160">
-            <a:solidFill>
-              <a:srgbClr val="EEEEEA"/>
-            </a:solidFill>
-          </a:ln>
-        </p:spPr>
-        <p:style>
-          <a:lnRef idx="1">
-            <a:schemeClr val="accent1"/>
-          </a:lnRef>
-          <a:fillRef idx="3">
-            <a:schemeClr val="accent1"/>
-          </a:fillRef>
-          <a:effectRef idx="2">
-            <a:schemeClr val="accent1"/>
-          </a:effectRef>
-          <a:fontRef idx="minor">
-            <a:schemeClr val="lt1"/>
-          </a:fontRef>
-        </p:style>
-        <p:txBody>
-          <a:bodyPr rtlCol="0" anchor="ctr"/>
-          <a:lstStyle/>
-          <a:p>
-            <a:pPr algn="ctr"/>
-            <a:endParaRPr/>
-          </a:p>
-        </p:txBody>
-      </p:sp>
-      <p:sp>
-        <p:nvSpPr>
-          <p:cNvPr id="3" name="TextBox 2"/>
-          <p:cNvSpPr txBox="1"/>
-          <p:nvPr/>
-        </p:nvSpPr>
-        <p:spPr>
-          <a:xfrm>
-            <a:off x="594360" y="484632"/>
-            <a:ext cx="1042416" cy="246888"/>
-          </a:xfrm>
-          <a:prstGeom prst="rect">
-            <a:avLst/>
-          </a:prstGeom>
-          <a:noFill/>
-        </p:spPr>
-        <p:txBody>
-          <a:bodyPr wrap="none" lIns="0" tIns="0" rIns="0" bIns="0" anchor="ctr">
-            <a:spAutoFit/>
-          </a:bodyPr>
-          <a:lstStyle/>
-          <a:p>
-            <a:pPr algn="ctr"/>
-            <a:r>
-              <a:rPr sz="850" b="1">
-                <a:solidFill>
-                  <a:srgbClr val="737373"/>
-                </a:solidFill>
-                <a:latin typeface="Aptos"/>
-              </a:rPr>
-              <a:t>RECHNUNG</a:t>
-            </a:r>
-          </a:p>
-        </p:txBody>
-      </p:sp>
-      <p:sp>
-        <p:nvSpPr>
-          <p:cNvPr id="4" name="TextBox 3"/>
-          <p:cNvSpPr txBox="1"/>
-          <p:nvPr/>
-        </p:nvSpPr>
-        <p:spPr>
-          <a:xfrm>
-            <a:off x="594360" y="932688"/>
-            <a:ext cx="10515600" cy="594360"/>
-          </a:xfrm>
-          <a:prstGeom prst="rect">
-            <a:avLst/>
-          </a:prstGeom>
-          <a:noFill/>
-        </p:spPr>
-        <p:txBody>
-          <a:bodyPr wrap="none" lIns="0" tIns="0" rIns="0" bIns="0" anchor="t">
-            <a:spAutoFit/>
-          </a:bodyPr>
-          <a:lstStyle/>
-          <a:p>
-            <a:pPr algn="l"/>
-            <a:r>
-              <a:rPr sz="3100" b="1">
-                <a:solidFill>
-                  <a:srgbClr val="171717"/>
-                </a:solidFill>
-                <a:latin typeface="Aptos"/>
-              </a:rPr>
-              <a:t>[Titel]</a:t>
-            </a:r>
-          </a:p>
-        </p:txBody>
-      </p:sp>
-      <p:sp>
-        <p:nvSpPr>
-          <p:cNvPr id="5" name="TextBox 4"/>
-          <p:cNvSpPr txBox="1"/>
-          <p:nvPr/>
-        </p:nvSpPr>
-        <p:spPr>
-          <a:xfrm>
-            <a:off x="612648" y="1609344"/>
-            <a:ext cx="9692640" cy="384048"/>
-          </a:xfrm>
-          <a:prstGeom prst="rect">
-            <a:avLst/>
-          </a:prstGeom>
-          <a:noFill/>
-        </p:spPr>
-        <p:txBody>
-          <a:bodyPr wrap="none" lIns="0" tIns="0" rIns="0" bIns="0" anchor="t">
-            <a:spAutoFit/>
-          </a:bodyPr>
-          <a:lstStyle/>
-          <a:p>
-            <a:pPr algn="l"/>
-            <a:r>
-              <a:rPr sz="1350" b="0" dirty="0">
-                <a:solidFill>
-                  <a:srgbClr val="737373"/>
-                </a:solidFill>
-                <a:latin typeface="Aptos"/>
-              </a:rPr>
-              <a:t>[optional: </a:t>
-            </a:r>
-            <a:r>
-              <a:rPr sz="1350" b="0" dirty="0" err="1">
-                <a:solidFill>
-                  <a:srgbClr val="737373"/>
-                </a:solidFill>
-                <a:latin typeface="Aptos"/>
-              </a:rPr>
-              <a:t>kurzer</a:t>
-            </a:r>
-            <a:r>
-              <a:rPr sz="1350" b="0" dirty="0">
-                <a:solidFill>
-                  <a:srgbClr val="737373"/>
-                </a:solidFill>
-                <a:latin typeface="Aptos"/>
-              </a:rPr>
-              <a:t> </a:t>
-            </a:r>
-            <a:r>
-              <a:rPr sz="1350" b="0" dirty="0" err="1">
-                <a:solidFill>
-                  <a:srgbClr val="737373"/>
-                </a:solidFill>
-                <a:latin typeface="Aptos"/>
-              </a:rPr>
-              <a:t>Kontext</a:t>
-            </a:r>
-            <a:r>
-              <a:rPr sz="1350" b="0" dirty="0">
-                <a:solidFill>
-                  <a:srgbClr val="737373"/>
-                </a:solidFill>
-                <a:latin typeface="Aptos"/>
-              </a:rPr>
-              <a:t>]</a:t>
-            </a:r>
-          </a:p>
-        </p:txBody>
-      </p:sp>
-      <p:cxnSp>
-        <p:nvCxnSpPr>
-          <p:cNvPr id="6" name="Connector 5"/>
-          <p:cNvCxnSpPr/>
-          <p:nvPr/>
-        </p:nvCxnSpPr>
-        <p:spPr>
-          <a:xfrm>
-            <a:off x="594360" y="6446520"/>
-            <a:ext cx="10972800" cy="0"/>
-          </a:xfrm>
-          <a:prstGeom prst="line">
-            <a:avLst/>
-          </a:prstGeom>
-          <a:ln w="12700">
-            <a:solidFill>
-              <a:srgbClr val="E8E8E5"/>
-            </a:solidFill>
-          </a:ln>
-        </p:spPr>
-        <p:style>
-          <a:lnRef idx="2">
-            <a:schemeClr val="accent1"/>
-          </a:lnRef>
-          <a:fillRef idx="0">
-            <a:schemeClr val="accent1"/>
-          </a:fillRef>
-          <a:effectRef idx="1">
-            <a:schemeClr val="accent1"/>
-          </a:effectRef>
-          <a:fontRef idx="minor">
-            <a:schemeClr val="tx1"/>
-          </a:fontRef>
-        </p:style>
-      </p:cxnSp>
-      <p:sp>
-        <p:nvSpPr>
-          <p:cNvPr id="7" name="TextBox 6"/>
-          <p:cNvSpPr txBox="1"/>
-          <p:nvPr/>
-        </p:nvSpPr>
-        <p:spPr>
-          <a:xfrm>
-            <a:off x="594360" y="6492240"/>
-            <a:ext cx="1554480" cy="201168"/>
-          </a:xfrm>
-          <a:prstGeom prst="rect">
-            <a:avLst/>
-          </a:prstGeom>
-          <a:noFill/>
-        </p:spPr>
-        <p:txBody>
-          <a:bodyPr wrap="none" lIns="0" tIns="0" rIns="0" bIns="0" anchor="t">
-            <a:spAutoFit/>
-          </a:bodyPr>
-          <a:lstStyle/>
-          <a:p>
-            <a:pPr algn="l"/>
-            <a:r>
-              <a:rPr sz="850" b="1">
-                <a:solidFill>
-                  <a:srgbClr val="737373"/>
-                </a:solidFill>
-                <a:latin typeface="Aptos"/>
-              </a:rPr>
-              <a:t>NUS1 · ÜBUNG</a:t>
-            </a:r>
-          </a:p>
-        </p:txBody>
-      </p:sp>
-      <p:sp>
-        <p:nvSpPr>
-          <p:cNvPr id="8" name="TextBox 7"/>
-          <p:cNvSpPr txBox="1"/>
-          <p:nvPr/>
-        </p:nvSpPr>
-        <p:spPr>
-          <a:xfrm>
-            <a:off x="10074075" y="6492240"/>
-            <a:ext cx="578685" cy="130805"/>
-          </a:xfrm>
-          <a:prstGeom prst="rect">
-            <a:avLst/>
-          </a:prstGeom>
-          <a:noFill/>
-        </p:spPr>
-        <p:txBody>
-          <a:bodyPr wrap="none" lIns="0" tIns="0" rIns="0" bIns="0" anchor="t">
-            <a:spAutoFit/>
-          </a:bodyPr>
-          <a:lstStyle/>
-          <a:p>
-            <a:pPr algn="r"/>
-            <a:r>
-              <a:rPr sz="850" b="0" dirty="0">
-                <a:solidFill>
-                  <a:srgbClr val="737373"/>
-                </a:solidFill>
-                <a:latin typeface="Aptos"/>
-              </a:rPr>
-              <a:t>Enrico Putzi </a:t>
-            </a:r>
-          </a:p>
-        </p:txBody>
-      </p:sp>
-      <p:sp>
-        <p:nvSpPr>
-          <p:cNvPr id="9" name="TextBox 8"/>
-          <p:cNvSpPr txBox="1"/>
-          <p:nvPr/>
-        </p:nvSpPr>
-        <p:spPr>
-          <a:xfrm>
-            <a:off x="10835640" y="6492240"/>
-            <a:ext cx="731520" cy="201168"/>
-          </a:xfrm>
-          <a:prstGeom prst="rect">
-            <a:avLst/>
-          </a:prstGeom>
-          <a:noFill/>
-        </p:spPr>
-        <p:txBody>
-          <a:bodyPr wrap="none" lIns="0" tIns="0" rIns="0" bIns="0" anchor="t">
-            <a:spAutoFit/>
-          </a:bodyPr>
-          <a:lstStyle/>
-          <a:p>
-            <a:pPr algn="r"/>
-            <a:r>
-              <a:rPr sz="850" b="1">
-                <a:solidFill>
-                  <a:srgbClr val="737373"/>
-                </a:solidFill>
-                <a:latin typeface="Aptos"/>
-              </a:rPr>
-              <a:t>W01</a:t>
-            </a:r>
-          </a:p>
-        </p:txBody>
-      </p:sp>
-      <p:sp>
-        <p:nvSpPr>
-          <p:cNvPr id="11" name="TextBox 10"/>
-          <p:cNvSpPr txBox="1"/>
-          <p:nvPr/>
-        </p:nvSpPr>
-        <p:spPr>
-          <a:xfrm>
-            <a:off x="914400" y="2880360"/>
-            <a:ext cx="10332720" cy="1051560"/>
-          </a:xfrm>
-          <a:prstGeom prst="rect">
-            <a:avLst/>
-          </a:prstGeom>
-          <a:noFill/>
-        </p:spPr>
-        <p:txBody>
-          <a:bodyPr wrap="none" lIns="0" tIns="0" rIns="0" bIns="0" anchor="ctr">
-            <a:spAutoFit/>
-          </a:bodyPr>
-          <a:lstStyle/>
-          <a:p>
-            <a:pPr algn="ctr"/>
-            <a:r>
-              <a:rPr sz="2900" b="1">
-                <a:solidFill>
-                  <a:srgbClr val="171717"/>
-                </a:solidFill>
-                <a:latin typeface="Aptos"/>
-              </a:rPr>
-              <a:t>[Formel / Rechnung / Lösungsweg]</a:t>
-            </a:r>
-          </a:p>
-        </p:txBody>
-      </p:sp>
-      <p:sp>
-        <p:nvSpPr>
-          <p:cNvPr id="12" name="TextBox 11"/>
-          <p:cNvSpPr txBox="1"/>
-          <p:nvPr/>
-        </p:nvSpPr>
-        <p:spPr>
-          <a:xfrm>
-            <a:off x="914400" y="4315968"/>
-            <a:ext cx="10332720" cy="457200"/>
-          </a:xfrm>
-          <a:prstGeom prst="rect">
-            <a:avLst/>
-          </a:prstGeom>
-          <a:noFill/>
-        </p:spPr>
-        <p:txBody>
-          <a:bodyPr wrap="none" lIns="0" tIns="0" rIns="0" bIns="0" anchor="t">
-            <a:spAutoFit/>
-          </a:bodyPr>
-          <a:lstStyle/>
-          <a:p>
-            <a:pPr algn="ctr"/>
-            <a:r>
-              <a:rPr sz="1400" b="0">
-                <a:solidFill>
-                  <a:srgbClr val="737373"/>
-                </a:solidFill>
-                <a:latin typeface="Aptos"/>
-              </a:rPr>
-              <a:t>Zwischenschritte / kurze Hinweise</a:t>
-            </a:r>
-          </a:p>
-        </p:txBody>
-      </p:sp>
-    </p:spTree>
-  </p:cSld>
-  <p:clrMapOvr>
-    <a:masterClrMapping/>
-  </p:clrMapOvr>
-</p:sld>
-</file>
-
-<file path=ppt/slides/slide8.xml><?xml version="1.0" encoding="utf-8"?>
-<p:sld xmlns:a="http://schemas.openxmlformats.org/drawingml/2006/main" xmlns:r="http://schemas.openxmlformats.org/officeDocument/2006/relationships" xmlns:p="http://schemas.openxmlformats.org/presentationml/2006/main">
-  <p:cSld>
-    <p:spTree>
-      <p:nvGrpSpPr>
         <p:cNvPr id="1" name="">
           <a:extLst>
             <a:ext uri="{FF2B5EF4-FFF2-40B4-BE49-F238E27FC236}">
@@ -8452,7 +8281,7 @@
         <p:spPr>
           <a:xfrm>
             <a:off x="594360" y="932688"/>
-            <a:ext cx="2365071" cy="477054"/>
+            <a:ext cx="2470869" cy="477054"/>
           </a:xfrm>
           <a:prstGeom prst="rect">
             <a:avLst/>
@@ -8467,13 +8296,13 @@
           <a:p>
             <a:pPr algn="l"/>
             <a:r>
-              <a:rPr lang="de-CH" sz="3100" b="1" dirty="0" err="1">
+              <a:rPr lang="de-CH" sz="3100" b="1" dirty="0">
                 <a:solidFill>
                   <a:srgbClr val="171717"/>
                 </a:solidFill>
                 <a:latin typeface="Aptos"/>
               </a:rPr>
-              <a:t>Linenintegral</a:t>
+              <a:t>Linienintegral</a:t>
             </a:r>
             <a:endParaRPr sz="3100" b="1" dirty="0">
               <a:solidFill>
@@ -8768,7 +8597,7 @@
 </p:sld>
 </file>
 
-<file path=ppt/slides/slide9.xml><?xml version="1.0" encoding="utf-8"?>
+<file path=ppt/slides/slide8.xml><?xml version="1.0" encoding="utf-8"?>
 <p:sld xmlns:a="http://schemas.openxmlformats.org/drawingml/2006/main" xmlns:r="http://schemas.openxmlformats.org/officeDocument/2006/relationships" xmlns:p="http://schemas.openxmlformats.org/presentationml/2006/main">
   <p:cSld>
     <p:spTree>
@@ -9247,7 +9076,7 @@
         </p:blipFill>
         <p:spPr>
           <a:xfrm>
-            <a:off x="6385018" y="1744110"/>
+            <a:off x="6833074" y="3198006"/>
             <a:ext cx="1772292" cy="805589"/>
           </a:xfrm>
           <a:prstGeom prst="rect">
@@ -9277,39 +9106,8 @@
         </p:blipFill>
         <p:spPr>
           <a:xfrm>
-            <a:off x="8401446" y="1744110"/>
+            <a:off x="8849502" y="3198006"/>
             <a:ext cx="1878627" cy="773554"/>
-          </a:xfrm>
-          <a:prstGeom prst="rect">
-            <a:avLst/>
-          </a:prstGeom>
-        </p:spPr>
-      </p:pic>
-      <p:pic>
-        <p:nvPicPr>
-          <p:cNvPr id="16" name="Grafik 15" descr="This Is Fine creator explains the timelessness of his meme | The Verge">
-            <a:extLst>
-              <a:ext uri="{FF2B5EF4-FFF2-40B4-BE49-F238E27FC236}">
-                <a16:creationId xmlns:a16="http://schemas.microsoft.com/office/drawing/2014/main" id="{DA3DAAA1-F075-03EA-F40B-F9B39BAD6C2C}"/>
-              </a:ext>
-            </a:extLst>
-          </p:cNvPr>
-          <p:cNvPicPr>
-            <a:picLocks noChangeAspect="1"/>
-          </p:cNvPicPr>
-          <p:nvPr/>
-        </p:nvPicPr>
-        <p:blipFill>
-          <a:blip r:embed="rId5"/>
-          <a:srcRect t="21459" b="19971"/>
-          <a:stretch>
-            <a:fillRect/>
-          </a:stretch>
-        </p:blipFill>
-        <p:spPr>
-          <a:xfrm>
-            <a:off x="6095999" y="2595418"/>
-            <a:ext cx="4714875" cy="2789382"/>
           </a:xfrm>
           <a:prstGeom prst="rect">
             <a:avLst/>
@@ -9354,7 +9152,7 @@
             </a:r>
             <a:r>
               <a:rPr lang="de-CH" sz="1400" dirty="0">
-                <a:hlinkClick r:id="rId6"/>
+                <a:hlinkClick r:id="rId5"/>
               </a:rPr>
               <a:t>https://www.youtube.com/watch?v=A76JpF7ktCI</a:t>
             </a:r>
@@ -9374,7 +9172,7 @@
             </a:r>
             <a:r>
               <a:rPr lang="de-CH" sz="1400" dirty="0">
-                <a:hlinkClick r:id="rId7"/>
+                <a:hlinkClick r:id="rId6"/>
               </a:rPr>
               <a:t>https://www.youtube.com/watch?v=NlGysPeUliY</a:t>
             </a:r>
@@ -9389,6 +9187,482 @@
     <p:extLst>
       <p:ext uri="{BB962C8B-B14F-4D97-AF65-F5344CB8AC3E}">
         <p14:creationId xmlns:p14="http://schemas.microsoft.com/office/powerpoint/2010/main" val="1021514222"/>
+      </p:ext>
+    </p:extLst>
+  </p:cSld>
+  <p:clrMapOvr>
+    <a:masterClrMapping/>
+  </p:clrMapOvr>
+</p:sld>
+</file>
+
+<file path=ppt/slides/slide9.xml><?xml version="1.0" encoding="utf-8"?>
+<p:sld xmlns:a="http://schemas.openxmlformats.org/drawingml/2006/main" xmlns:r="http://schemas.openxmlformats.org/officeDocument/2006/relationships" xmlns:p="http://schemas.openxmlformats.org/presentationml/2006/main">
+  <p:cSld>
+    <p:spTree>
+      <p:nvGrpSpPr>
+        <p:cNvPr id="1" name=""/>
+        <p:cNvGrpSpPr/>
+        <p:nvPr/>
+      </p:nvGrpSpPr>
+      <p:grpSpPr>
+        <a:xfrm>
+          <a:off x="0" y="0"/>
+          <a:ext cx="0" cy="0"/>
+          <a:chOff x="0" y="0"/>
+          <a:chExt cx="0" cy="0"/>
+        </a:xfrm>
+      </p:grpSpPr>
+      <p:sp>
+        <p:nvSpPr>
+          <p:cNvPr id="2" name="Rounded Rectangle 1"/>
+          <p:cNvSpPr/>
+          <p:nvPr/>
+        </p:nvSpPr>
+        <p:spPr>
+          <a:xfrm>
+            <a:off x="594360" y="475488"/>
+            <a:ext cx="1042416" cy="292608"/>
+          </a:xfrm>
+          <a:prstGeom prst="roundRect">
+            <a:avLst/>
+          </a:prstGeom>
+          <a:solidFill>
+            <a:srgbClr val="EEEEEA"/>
+          </a:solidFill>
+          <a:ln w="10160">
+            <a:solidFill>
+              <a:srgbClr val="EEEEEA"/>
+            </a:solidFill>
+          </a:ln>
+        </p:spPr>
+        <p:style>
+          <a:lnRef idx="1">
+            <a:schemeClr val="accent1"/>
+          </a:lnRef>
+          <a:fillRef idx="3">
+            <a:schemeClr val="accent1"/>
+          </a:fillRef>
+          <a:effectRef idx="2">
+            <a:schemeClr val="accent1"/>
+          </a:effectRef>
+          <a:fontRef idx="minor">
+            <a:schemeClr val="lt1"/>
+          </a:fontRef>
+        </p:style>
+        <p:txBody>
+          <a:bodyPr rtlCol="0" anchor="ctr"/>
+          <a:lstStyle/>
+          <a:p>
+            <a:pPr algn="ctr"/>
+            <a:endParaRPr/>
+          </a:p>
+        </p:txBody>
+      </p:sp>
+      <p:sp>
+        <p:nvSpPr>
+          <p:cNvPr id="3" name="TextBox 2"/>
+          <p:cNvSpPr txBox="1"/>
+          <p:nvPr/>
+        </p:nvSpPr>
+        <p:spPr>
+          <a:xfrm>
+            <a:off x="594360" y="484632"/>
+            <a:ext cx="1042416" cy="246888"/>
+          </a:xfrm>
+          <a:prstGeom prst="rect">
+            <a:avLst/>
+          </a:prstGeom>
+          <a:noFill/>
+        </p:spPr>
+        <p:txBody>
+          <a:bodyPr wrap="none" lIns="0" tIns="0" rIns="0" bIns="0" anchor="ctr">
+            <a:spAutoFit/>
+          </a:bodyPr>
+          <a:lstStyle/>
+          <a:p>
+            <a:pPr algn="ctr"/>
+            <a:r>
+              <a:rPr sz="850" b="1">
+                <a:solidFill>
+                  <a:srgbClr val="737373"/>
+                </a:solidFill>
+                <a:latin typeface="Aptos"/>
+              </a:rPr>
+              <a:t>RECHNUNG</a:t>
+            </a:r>
+          </a:p>
+        </p:txBody>
+      </p:sp>
+      <p:sp>
+        <p:nvSpPr>
+          <p:cNvPr id="4" name="TextBox 3"/>
+          <p:cNvSpPr txBox="1"/>
+          <p:nvPr/>
+        </p:nvSpPr>
+        <p:spPr>
+          <a:xfrm>
+            <a:off x="594360" y="932688"/>
+            <a:ext cx="4881144" cy="477054"/>
+          </a:xfrm>
+          <a:prstGeom prst="rect">
+            <a:avLst/>
+          </a:prstGeom>
+          <a:noFill/>
+        </p:spPr>
+        <p:txBody>
+          <a:bodyPr wrap="none" lIns="0" tIns="0" rIns="0" bIns="0" anchor="t">
+            <a:spAutoFit/>
+          </a:bodyPr>
+          <a:lstStyle/>
+          <a:p>
+            <a:pPr algn="l"/>
+            <a:r>
+              <a:rPr lang="de-CH" sz="3100" b="1" dirty="0">
+                <a:solidFill>
+                  <a:srgbClr val="171717"/>
+                </a:solidFill>
+                <a:latin typeface="Aptos"/>
+              </a:rPr>
+              <a:t>Rechteckfläche berechnen</a:t>
+            </a:r>
+            <a:endParaRPr sz="3100" b="1" dirty="0">
+              <a:solidFill>
+                <a:srgbClr val="171717"/>
+              </a:solidFill>
+              <a:latin typeface="Aptos"/>
+            </a:endParaRPr>
+          </a:p>
+        </p:txBody>
+      </p:sp>
+      <p:cxnSp>
+        <p:nvCxnSpPr>
+          <p:cNvPr id="6" name="Connector 5"/>
+          <p:cNvCxnSpPr/>
+          <p:nvPr/>
+        </p:nvCxnSpPr>
+        <p:spPr>
+          <a:xfrm>
+            <a:off x="594360" y="6446520"/>
+            <a:ext cx="10972800" cy="0"/>
+          </a:xfrm>
+          <a:prstGeom prst="line">
+            <a:avLst/>
+          </a:prstGeom>
+          <a:ln w="12700">
+            <a:solidFill>
+              <a:srgbClr val="E8E8E5"/>
+            </a:solidFill>
+          </a:ln>
+        </p:spPr>
+        <p:style>
+          <a:lnRef idx="2">
+            <a:schemeClr val="accent1"/>
+          </a:lnRef>
+          <a:fillRef idx="0">
+            <a:schemeClr val="accent1"/>
+          </a:fillRef>
+          <a:effectRef idx="1">
+            <a:schemeClr val="accent1"/>
+          </a:effectRef>
+          <a:fontRef idx="minor">
+            <a:schemeClr val="tx1"/>
+          </a:fontRef>
+        </p:style>
+      </p:cxnSp>
+      <p:sp>
+        <p:nvSpPr>
+          <p:cNvPr id="7" name="TextBox 6"/>
+          <p:cNvSpPr txBox="1"/>
+          <p:nvPr/>
+        </p:nvSpPr>
+        <p:spPr>
+          <a:xfrm>
+            <a:off x="594360" y="6492240"/>
+            <a:ext cx="1554480" cy="201168"/>
+          </a:xfrm>
+          <a:prstGeom prst="rect">
+            <a:avLst/>
+          </a:prstGeom>
+          <a:noFill/>
+        </p:spPr>
+        <p:txBody>
+          <a:bodyPr wrap="none" lIns="0" tIns="0" rIns="0" bIns="0" anchor="t">
+            <a:spAutoFit/>
+          </a:bodyPr>
+          <a:lstStyle/>
+          <a:p>
+            <a:pPr algn="l"/>
+            <a:r>
+              <a:rPr sz="850" b="1">
+                <a:solidFill>
+                  <a:srgbClr val="737373"/>
+                </a:solidFill>
+                <a:latin typeface="Aptos"/>
+              </a:rPr>
+              <a:t>NUS1 · ÜBUNG</a:t>
+            </a:r>
+          </a:p>
+        </p:txBody>
+      </p:sp>
+      <p:sp>
+        <p:nvSpPr>
+          <p:cNvPr id="8" name="TextBox 7"/>
+          <p:cNvSpPr txBox="1"/>
+          <p:nvPr/>
+        </p:nvSpPr>
+        <p:spPr>
+          <a:xfrm>
+            <a:off x="10074075" y="6492240"/>
+            <a:ext cx="578685" cy="130805"/>
+          </a:xfrm>
+          <a:prstGeom prst="rect">
+            <a:avLst/>
+          </a:prstGeom>
+          <a:noFill/>
+        </p:spPr>
+        <p:txBody>
+          <a:bodyPr wrap="none" lIns="0" tIns="0" rIns="0" bIns="0" anchor="t">
+            <a:spAutoFit/>
+          </a:bodyPr>
+          <a:lstStyle/>
+          <a:p>
+            <a:pPr algn="r"/>
+            <a:r>
+              <a:rPr sz="850" b="0" dirty="0">
+                <a:solidFill>
+                  <a:srgbClr val="737373"/>
+                </a:solidFill>
+                <a:latin typeface="Aptos"/>
+              </a:rPr>
+              <a:t>Enrico Putzi </a:t>
+            </a:r>
+          </a:p>
+        </p:txBody>
+      </p:sp>
+      <p:sp>
+        <p:nvSpPr>
+          <p:cNvPr id="9" name="TextBox 8"/>
+          <p:cNvSpPr txBox="1"/>
+          <p:nvPr/>
+        </p:nvSpPr>
+        <p:spPr>
+          <a:xfrm>
+            <a:off x="10835640" y="6492240"/>
+            <a:ext cx="731520" cy="201168"/>
+          </a:xfrm>
+          <a:prstGeom prst="rect">
+            <a:avLst/>
+          </a:prstGeom>
+          <a:noFill/>
+        </p:spPr>
+        <p:txBody>
+          <a:bodyPr wrap="none" lIns="0" tIns="0" rIns="0" bIns="0" anchor="t">
+            <a:spAutoFit/>
+          </a:bodyPr>
+          <a:lstStyle/>
+          <a:p>
+            <a:pPr algn="r"/>
+            <a:r>
+              <a:rPr sz="850" b="1">
+                <a:solidFill>
+                  <a:srgbClr val="737373"/>
+                </a:solidFill>
+                <a:latin typeface="Aptos"/>
+              </a:rPr>
+              <a:t>W01</a:t>
+            </a:r>
+          </a:p>
+        </p:txBody>
+      </p:sp>
+      <mc:AlternateContent xmlns:mc="http://schemas.openxmlformats.org/markup-compatibility/2006">
+        <mc:Choice xmlns:a14="http://schemas.microsoft.com/office/drawing/2010/main" Requires="a14">
+          <p:sp>
+            <p:nvSpPr>
+              <p:cNvPr id="10" name="Textfeld 9">
+                <a:extLst>
+                  <a:ext uri="{FF2B5EF4-FFF2-40B4-BE49-F238E27FC236}">
+                    <a16:creationId xmlns:a16="http://schemas.microsoft.com/office/drawing/2014/main" id="{A6DB7050-2DE9-9E0F-B329-CB72D7CE069B}"/>
+                  </a:ext>
+                </a:extLst>
+              </p:cNvPr>
+              <p:cNvSpPr txBox="1"/>
+              <p:nvPr/>
+            </p:nvSpPr>
+            <p:spPr>
+              <a:xfrm>
+                <a:off x="594360" y="1527521"/>
+                <a:ext cx="2925994" cy="968791"/>
+              </a:xfrm>
+              <a:prstGeom prst="rect">
+                <a:avLst/>
+              </a:prstGeom>
+              <a:noFill/>
+            </p:spPr>
+            <p:txBody>
+              <a:bodyPr wrap="none" lIns="0" tIns="0" rIns="0" bIns="0" rtlCol="0">
+                <a:spAutoFit/>
+              </a:bodyPr>
+              <a:lstStyle/>
+              <a:p>
+                <a14:m>
+                  <m:oMathPara xmlns:m="http://schemas.openxmlformats.org/officeDocument/2006/math">
+                    <m:oMath>
+                      <m:r>
+                        <a:rPr lang="de-CH" sz="2800" i="1" smtClean="0">
+                          <a:latin typeface="Cambria Math" panose="02040503050406030204" pitchFamily="18" charset="0"/>
+                        </a:rPr>
+                        <m:t>𝐴</m:t>
+                      </m:r>
+                      <m:r>
+                        <a:rPr lang="de-CH" sz="2800" i="0">
+                          <a:latin typeface="Cambria Math" panose="02040503050406030204" pitchFamily="18" charset="0"/>
+                        </a:rPr>
+                        <m:t>=</m:t>
+                      </m:r>
+                      <m:nary>
+                        <m:naryPr>
+                          <m:limLoc m:val="subSup"/>
+                          <m:ctrlPr>
+                            <a:rPr lang="de-CH" sz="2800" i="0">
+                              <a:latin typeface="Cambria Math" panose="02040503050406030204" pitchFamily="18" charset="0"/>
+                            </a:rPr>
+                          </m:ctrlPr>
+                        </m:naryPr>
+                        <m:sub>
+                          <m:r>
+                            <a:rPr lang="de-CH" sz="2800" i="0">
+                              <a:latin typeface="Cambria Math" panose="02040503050406030204" pitchFamily="18" charset="0"/>
+                            </a:rPr>
+                            <m:t>0</m:t>
+                          </m:r>
+                        </m:sub>
+                        <m:sup>
+                          <m:r>
+                            <a:rPr lang="de-CH" sz="2800" i="0">
+                              <a:latin typeface="Cambria Math" panose="02040503050406030204" pitchFamily="18" charset="0"/>
+                            </a:rPr>
+                            <m:t>3</m:t>
+                          </m:r>
+                        </m:sup>
+                        <m:e>
+                          <m:nary>
+                            <m:naryPr>
+                              <m:limLoc m:val="subSup"/>
+                              <m:ctrlPr>
+                                <a:rPr lang="de-CH" sz="2800" i="0">
+                                  <a:latin typeface="Cambria Math" panose="02040503050406030204" pitchFamily="18" charset="0"/>
+                                </a:rPr>
+                              </m:ctrlPr>
+                            </m:naryPr>
+                            <m:sub>
+                              <m:r>
+                                <a:rPr lang="de-CH" sz="2800" i="0">
+                                  <a:latin typeface="Cambria Math" panose="02040503050406030204" pitchFamily="18" charset="0"/>
+                                </a:rPr>
+                                <m:t>0</m:t>
+                              </m:r>
+                            </m:sub>
+                            <m:sup>
+                              <m:r>
+                                <a:rPr lang="de-CH" sz="2800" i="0">
+                                  <a:latin typeface="Cambria Math" panose="02040503050406030204" pitchFamily="18" charset="0"/>
+                                </a:rPr>
+                                <m:t>2</m:t>
+                              </m:r>
+                            </m:sup>
+                            <m:e>
+                              <m:r>
+                                <a:rPr lang="de-CH" sz="2800" i="0">
+                                  <a:latin typeface="Cambria Math" panose="02040503050406030204" pitchFamily="18" charset="0"/>
+                                </a:rPr>
+                                <m:t>1</m:t>
+                              </m:r>
+                            </m:e>
+                          </m:nary>
+                        </m:e>
+                      </m:nary>
+                      <m:r>
+                        <a:rPr lang="de-CH" sz="2800" i="0">
+                          <a:latin typeface="Cambria Math" panose="02040503050406030204" pitchFamily="18" charset="0"/>
+                        </a:rPr>
+                        <m:t> </m:t>
+                      </m:r>
+                      <m:r>
+                        <a:rPr lang="de-CH" sz="2800" i="1">
+                          <a:latin typeface="Cambria Math" panose="02040503050406030204" pitchFamily="18" charset="0"/>
+                        </a:rPr>
+                        <m:t>𝑑𝑦</m:t>
+                      </m:r>
+                      <m:r>
+                        <a:rPr lang="de-CH" sz="2800" i="0">
+                          <a:latin typeface="Cambria Math" panose="02040503050406030204" pitchFamily="18" charset="0"/>
+                        </a:rPr>
+                        <m:t> </m:t>
+                      </m:r>
+                      <m:r>
+                        <a:rPr lang="de-CH" sz="2800" i="1">
+                          <a:latin typeface="Cambria Math" panose="02040503050406030204" pitchFamily="18" charset="0"/>
+                        </a:rPr>
+                        <m:t>𝑑𝑥</m:t>
+                      </m:r>
+                    </m:oMath>
+                  </m:oMathPara>
+                </a14:m>
+                <a:endParaRPr lang="de-CH" sz="2800" dirty="0"/>
+              </a:p>
+            </p:txBody>
+          </p:sp>
+        </mc:Choice>
+        <mc:Fallback>
+          <p:sp>
+            <p:nvSpPr>
+              <p:cNvPr id="10" name="Textfeld 9">
+                <a:extLst>
+                  <a:ext uri="{FF2B5EF4-FFF2-40B4-BE49-F238E27FC236}">
+                    <a16:creationId xmlns:a16="http://schemas.microsoft.com/office/drawing/2014/main" id="{A6DB7050-2DE9-9E0F-B329-CB72D7CE069B}"/>
+                  </a:ext>
+                </a:extLst>
+              </p:cNvPr>
+              <p:cNvSpPr txBox="1">
+                <a:spLocks noRot="1" noChangeAspect="1" noMove="1" noResize="1" noEditPoints="1" noAdjustHandles="1" noChangeArrowheads="1" noChangeShapeType="1" noTextEdit="1"/>
+              </p:cNvSpPr>
+              <p:nvPr/>
+            </p:nvSpPr>
+            <p:spPr>
+              <a:xfrm>
+                <a:off x="594360" y="1527521"/>
+                <a:ext cx="2925994" cy="968791"/>
+              </a:xfrm>
+              <a:prstGeom prst="rect">
+                <a:avLst/>
+              </a:prstGeom>
+              <a:blipFill>
+                <a:blip r:embed="rId3"/>
+                <a:stretch>
+                  <a:fillRect/>
+                </a:stretch>
+              </a:blipFill>
+            </p:spPr>
+            <p:txBody>
+              <a:bodyPr/>
+              <a:lstStyle/>
+              <a:p>
+                <a:r>
+                  <a:rPr lang="de-CH">
+                    <a:noFill/>
+                  </a:rPr>
+                  <a:t> </a:t>
+                </a:r>
+              </a:p>
+            </p:txBody>
+          </p:sp>
+        </mc:Fallback>
+      </mc:AlternateContent>
+    </p:spTree>
+    <p:extLst>
+      <p:ext uri="{BB962C8B-B14F-4D97-AF65-F5344CB8AC3E}">
+        <p14:creationId xmlns:p14="http://schemas.microsoft.com/office/powerpoint/2010/main" val="3981641209"/>
       </p:ext>
     </p:extLst>
   </p:cSld>

--- a/courses/nus1/files/slides/W01.pptx
+++ b/courses/nus1/files/slides/W01.pptx
@@ -4665,8 +4665,8 @@
         </p:nvSpPr>
         <p:spPr>
           <a:xfrm>
-            <a:off x="594360" y="484632"/>
-            <a:ext cx="969264" cy="246888"/>
+            <a:off x="938729" y="542673"/>
+            <a:ext cx="280526" cy="130805"/>
           </a:xfrm>
           <a:prstGeom prst="rect">
             <a:avLst/>
@@ -4681,14 +4681,20 @@
           <a:p>
             <a:pPr algn="ctr"/>
             <a:r>
-              <a:rPr sz="850" b="1">
+              <a:rPr lang="de-CH" sz="850" b="1" dirty="0">
                 <a:solidFill>
                   <a:srgbClr val="737373"/>
                 </a:solidFill>
                 <a:latin typeface="Aptos"/>
               </a:rPr>
-              <a:t>AM ENDE</a:t>
-            </a:r>
+              <a:t>ENDE</a:t>
+            </a:r>
+            <a:endParaRPr sz="850" b="1" dirty="0">
+              <a:solidFill>
+                <a:srgbClr val="737373"/>
+              </a:solidFill>
+              <a:latin typeface="Aptos"/>
+            </a:endParaRPr>
           </a:p>
         </p:txBody>
       </p:sp>
